--- a/유웹디_브랜딩/샘플_하루건축_견적서_A4.pptx
+++ b/유웹디_브랜딩/샘플_하루건축_견적서_A4.pptx
@@ -1828,7 +1828,7 @@
                 <a:ea typeface="Malgun Gothic" pitchFamily="34" charset="-122"/>
                 <a:cs typeface="Malgun Gothic" pitchFamily="34" charset="-120"/>
               </a:rPr>
-              <a:t>000-00-00000</a:t>
+              <a:t>452-64-00805</a:t>
             </a:r>
             <a:endParaRPr lang="en-US" sz="1050" dirty="0"/>
           </a:p>

--- a/유웹디_브랜딩/샘플_하루건축_견적서_A4.pptx
+++ b/유웹디_브랜딩/샘플_하루건축_견적서_A4.pptx
@@ -5075,372 +5075,20 @@
       </p:sp>
       <p:sp>
         <p:nvSpPr>
-          <p:cNvPr id="40" name="text-39"/>
-          <p:cNvSpPr txBox="1"/>
-          <p:nvPr/>
-        </p:nvSpPr>
-        <p:spPr>
-          <a:xfrm>
-            <a:off x="647998" y="5311080"/>
-            <a:ext cx="267486" cy="133350"/>
-          </a:xfrm>
-          <a:prstGeom prst="rect">
-            <a:avLst/>
-          </a:prstGeom>
-          <a:noFill/>
-          <a:ln/>
-        </p:spPr>
-        <p:txBody>
-          <a:bodyPr wrap="none" lIns="0" tIns="0" rIns="0" bIns="0" rtlCol="0" anchor="ctr"/>
-          <a:lstStyle/>
-          <a:p>
-            <a:pPr algn="l" indent="0" marL="0">
-              <a:buNone/>
-            </a:pPr>
-            <a:r>
-              <a:rPr lang="ko-KR" altLang="en-US" sz="900" b="1" spc="90" kern="0" dirty="0">
-                <a:solidFill>
-                  <a:srgbClr val="16181D"/>
-                </a:solidFill>
-                <a:latin typeface="Pretendard" pitchFamily="34" charset="0"/>
-                <a:ea typeface="Pretendard" pitchFamily="34" charset="-122"/>
-                <a:cs typeface="Pretendard" pitchFamily="34" charset="-120"/>
-              </a:rPr>
-              <a:t>비고</a:t>
-            </a:r>
-            <a:endParaRPr lang="ko-KR" sz="900" dirty="0"/>
-          </a:p>
-        </p:txBody>
-      </p:sp>
-      <p:sp>
-        <p:nvSpPr>
-          <p:cNvPr id="41" name="dot-40"/>
+          <p:cNvPr id="40" name="box-39"/>
           <p:cNvSpPr/>
           <p:nvPr/>
         </p:nvSpPr>
         <p:spPr>
           <a:xfrm>
-            <a:off x="688479" y="5595342"/>
-            <a:ext cx="42863" cy="42863"/>
-          </a:xfrm>
-          <a:prstGeom prst="ellipse">
-            <a:avLst/>
-          </a:prstGeom>
-          <a:solidFill>
-            <a:srgbClr val="5B6270"/>
-          </a:solidFill>
-          <a:ln/>
-        </p:spPr>
-      </p:sp>
-      <p:sp>
-        <p:nvSpPr>
-          <p:cNvPr id="42" name="text-41"/>
-          <p:cNvSpPr txBox="1"/>
-          <p:nvPr/>
-        </p:nvSpPr>
-        <p:spPr>
-          <a:xfrm>
-            <a:off x="819448" y="5545336"/>
-            <a:ext cx="497336" cy="142875"/>
-          </a:xfrm>
-          <a:prstGeom prst="rect">
-            <a:avLst/>
-          </a:prstGeom>
-          <a:noFill/>
-          <a:ln/>
-        </p:spPr>
-        <p:txBody>
-          <a:bodyPr wrap="none" lIns="0" tIns="0" rIns="0" bIns="0" rtlCol="0" anchor="ctr"/>
-          <a:lstStyle/>
-          <a:p>
-            <a:pPr algn="l" indent="0" marL="0">
-              <a:buNone/>
-            </a:pPr>
-            <a:r>
-              <a:rPr lang="ko-KR" altLang="en-US" sz="938" dirty="0">
-                <a:solidFill>
-                  <a:srgbClr val="5B6270"/>
-                </a:solidFill>
-                <a:latin typeface="Pretendard" pitchFamily="34" charset="0"/>
-                <a:ea typeface="Pretendard" pitchFamily="34" charset="-122"/>
-                <a:cs typeface="Pretendard" pitchFamily="34" charset="-120"/>
-              </a:rPr>
-              <a:t>위 금액은</a:t>
-            </a:r>
-            <a:endParaRPr lang="ko-KR" sz="938" dirty="0"/>
-          </a:p>
-        </p:txBody>
-      </p:sp>
-      <p:sp>
-        <p:nvSpPr>
-          <p:cNvPr id="43" name="text-42"/>
-          <p:cNvSpPr txBox="1"/>
-          <p:nvPr/>
-        </p:nvSpPr>
-        <p:spPr>
-          <a:xfrm>
-            <a:off x="1290935" y="5545336"/>
-            <a:ext cx="601813" cy="142875"/>
-          </a:xfrm>
-          <a:prstGeom prst="rect">
-            <a:avLst/>
-          </a:prstGeom>
-          <a:noFill/>
-          <a:ln/>
-        </p:spPr>
-        <p:txBody>
-          <a:bodyPr wrap="none" lIns="0" tIns="0" rIns="0" bIns="0" rtlCol="0" anchor="ctr"/>
-          <a:lstStyle/>
-          <a:p>
-            <a:pPr algn="l" indent="0" marL="0">
-              <a:buNone/>
-            </a:pPr>
-            <a:r>
-              <a:rPr lang="ko-KR" altLang="en-US" sz="938" b="1" dirty="0">
-                <a:solidFill>
-                  <a:srgbClr val="5B6270"/>
-                </a:solidFill>
-                <a:latin typeface="Pretendard" pitchFamily="34" charset="0"/>
-                <a:ea typeface="Pretendard" pitchFamily="34" charset="-122"/>
-                <a:cs typeface="Pretendard" pitchFamily="34" charset="-120"/>
-              </a:rPr>
-              <a:t>부가세 별도</a:t>
-            </a:r>
-            <a:endParaRPr lang="ko-KR" sz="938" dirty="0"/>
-          </a:p>
-        </p:txBody>
-      </p:sp>
-      <p:sp>
-        <p:nvSpPr>
-          <p:cNvPr id="44" name="text-43"/>
-          <p:cNvSpPr txBox="1"/>
-          <p:nvPr/>
-        </p:nvSpPr>
-        <p:spPr>
-          <a:xfrm>
-            <a:off x="1862733" y="5545336"/>
-            <a:ext cx="2884372" cy="142875"/>
-          </a:xfrm>
-          <a:prstGeom prst="rect">
-            <a:avLst/>
-          </a:prstGeom>
-          <a:noFill/>
-          <a:ln/>
-        </p:spPr>
-        <p:txBody>
-          <a:bodyPr wrap="none" lIns="0" tIns="0" rIns="0" bIns="0" rtlCol="0" anchor="ctr"/>
-          <a:lstStyle/>
-          <a:p>
-            <a:pPr algn="l" indent="0" marL="0">
-              <a:buNone/>
-            </a:pPr>
-            <a:r>
-              <a:rPr lang="ko-KR" altLang="en-US" sz="938" dirty="0">
-                <a:solidFill>
-                  <a:srgbClr val="5B6270"/>
-                </a:solidFill>
-                <a:latin typeface="Pretendard" pitchFamily="34" charset="0"/>
-                <a:ea typeface="Pretendard" pitchFamily="34" charset="-122"/>
-                <a:cs typeface="Pretendard" pitchFamily="34" charset="-120"/>
-              </a:rPr>
-              <a:t>금액이며, 부가세 10%를 더한 합계는 3,300,000원입니다.</a:t>
-            </a:r>
-            <a:endParaRPr lang="ko-KR" sz="938" dirty="0"/>
-          </a:p>
-        </p:txBody>
-      </p:sp>
-      <p:sp>
-        <p:nvSpPr>
-          <p:cNvPr id="45" name="dot-44"/>
-          <p:cNvSpPr/>
-          <p:nvPr/>
-        </p:nvSpPr>
-        <p:spPr>
-          <a:xfrm>
-            <a:off x="688479" y="5798939"/>
-            <a:ext cx="42863" cy="42863"/>
-          </a:xfrm>
-          <a:prstGeom prst="ellipse">
-            <a:avLst/>
-          </a:prstGeom>
-          <a:solidFill>
-            <a:srgbClr val="5B6270"/>
-          </a:solidFill>
-          <a:ln/>
-        </p:spPr>
-      </p:sp>
-      <p:sp>
-        <p:nvSpPr>
-          <p:cNvPr id="46" name="text-45"/>
-          <p:cNvSpPr txBox="1"/>
-          <p:nvPr/>
-        </p:nvSpPr>
-        <p:spPr>
-          <a:xfrm>
-            <a:off x="819448" y="5748933"/>
-            <a:ext cx="2174391" cy="142875"/>
-          </a:xfrm>
-          <a:prstGeom prst="rect">
-            <a:avLst/>
-          </a:prstGeom>
-          <a:noFill/>
-          <a:ln/>
-        </p:spPr>
-        <p:txBody>
-          <a:bodyPr wrap="none" lIns="0" tIns="0" rIns="0" bIns="0" rtlCol="0" anchor="ctr"/>
-          <a:lstStyle/>
-          <a:p>
-            <a:pPr algn="l" indent="0" marL="0">
-              <a:buNone/>
-            </a:pPr>
-            <a:r>
-              <a:rPr lang="ko-KR" altLang="en-US" sz="938" dirty="0">
-                <a:solidFill>
-                  <a:srgbClr val="5B6270"/>
-                </a:solidFill>
-                <a:latin typeface="Pretendard" pitchFamily="34" charset="0"/>
-                <a:ea typeface="Pretendard" pitchFamily="34" charset="-122"/>
-                <a:cs typeface="Pretendard" pitchFamily="34" charset="-120"/>
-              </a:rPr>
-              <a:t>결제 조건: 계약 시 50%, 오픈 시 잔금 50%.</a:t>
-            </a:r>
-            <a:endParaRPr lang="ko-KR" sz="938" dirty="0"/>
-          </a:p>
-        </p:txBody>
-      </p:sp>
-      <p:sp>
-        <p:nvSpPr>
-          <p:cNvPr id="47" name="dot-46"/>
-          <p:cNvSpPr/>
-          <p:nvPr/>
-        </p:nvSpPr>
-        <p:spPr>
-          <a:xfrm>
-            <a:off x="688479" y="6002536"/>
-            <a:ext cx="42863" cy="42863"/>
-          </a:xfrm>
-          <a:prstGeom prst="ellipse">
-            <a:avLst/>
-          </a:prstGeom>
-          <a:solidFill>
-            <a:srgbClr val="5B6270"/>
-          </a:solidFill>
-          <a:ln/>
-        </p:spPr>
-      </p:sp>
-      <p:sp>
-        <p:nvSpPr>
-          <p:cNvPr id="48" name="text-47"/>
-          <p:cNvSpPr txBox="1"/>
-          <p:nvPr/>
-        </p:nvSpPr>
-        <p:spPr>
-          <a:xfrm>
-            <a:off x="819448" y="5952530"/>
-            <a:ext cx="5319236" cy="142875"/>
-          </a:xfrm>
-          <a:prstGeom prst="rect">
-            <a:avLst/>
-          </a:prstGeom>
-          <a:noFill/>
-          <a:ln/>
-        </p:spPr>
-        <p:txBody>
-          <a:bodyPr wrap="none" lIns="0" tIns="0" rIns="0" bIns="0" rtlCol="0" anchor="ctr"/>
-          <a:lstStyle/>
-          <a:p>
-            <a:pPr algn="l" indent="0" marL="0">
-              <a:buNone/>
-            </a:pPr>
-            <a:r>
-              <a:rPr lang="ko-KR" altLang="en-US" sz="938" dirty="0">
-                <a:solidFill>
-                  <a:srgbClr val="5B6270"/>
-                </a:solidFill>
-                <a:latin typeface="Pretendard" pitchFamily="34" charset="0"/>
-                <a:ea typeface="Pretendard" pitchFamily="34" charset="-122"/>
-                <a:cs typeface="Pretendard" pitchFamily="34" charset="-120"/>
-              </a:rPr>
-              <a:t>제작 기간: 계약 및 자료 수령 후 약 3주. 웹빌더 호스팅·도메인·SSL 비용은 제작비와 별도입니다(위 안내 참조).</a:t>
-            </a:r>
-            <a:endParaRPr lang="ko-KR" sz="938" dirty="0"/>
-          </a:p>
-        </p:txBody>
-      </p:sp>
-      <p:sp>
-        <p:nvSpPr>
-          <p:cNvPr id="49" name="dot-48"/>
-          <p:cNvSpPr/>
-          <p:nvPr/>
-        </p:nvSpPr>
-        <p:spPr>
-          <a:xfrm>
-            <a:off x="688479" y="6206133"/>
-            <a:ext cx="42863" cy="42863"/>
-          </a:xfrm>
-          <a:prstGeom prst="ellipse">
-            <a:avLst/>
-          </a:prstGeom>
-          <a:solidFill>
-            <a:srgbClr val="5B6270"/>
-          </a:solidFill>
-          <a:ln/>
-        </p:spPr>
-      </p:sp>
-      <p:sp>
-        <p:nvSpPr>
-          <p:cNvPr id="50" name="text-49"/>
-          <p:cNvSpPr txBox="1"/>
-          <p:nvPr/>
-        </p:nvSpPr>
-        <p:spPr>
-          <a:xfrm>
-            <a:off x="819448" y="6156127"/>
-            <a:ext cx="1978902" cy="142875"/>
-          </a:xfrm>
-          <a:prstGeom prst="rect">
-            <a:avLst/>
-          </a:prstGeom>
-          <a:noFill/>
-          <a:ln/>
-        </p:spPr>
-        <p:txBody>
-          <a:bodyPr wrap="none" lIns="0" tIns="0" rIns="0" bIns="0" rtlCol="0" anchor="ctr"/>
-          <a:lstStyle/>
-          <a:p>
-            <a:pPr algn="l" indent="0" marL="0">
-              <a:buNone/>
-            </a:pPr>
-            <a:r>
-              <a:rPr lang="ko-KR" altLang="en-US" sz="938" dirty="0">
-                <a:solidFill>
-                  <a:srgbClr val="5B6270"/>
-                </a:solidFill>
-                <a:latin typeface="Pretendard" pitchFamily="34" charset="0"/>
-                <a:ea typeface="Pretendard" pitchFamily="34" charset="-122"/>
-                <a:cs typeface="Pretendard" pitchFamily="34" charset="-120"/>
-              </a:rPr>
-              <a:t>수정은 시안 단계별 2회까지 포함합니다.</a:t>
-            </a:r>
-            <a:endParaRPr lang="ko-KR" sz="938" dirty="0"/>
-          </a:p>
-        </p:txBody>
-      </p:sp>
-      <p:sp>
-        <p:nvSpPr>
-          <p:cNvPr id="51" name="line-50"/>
-          <p:cNvSpPr/>
-          <p:nvPr/>
-        </p:nvSpPr>
-        <p:spPr>
-          <a:xfrm>
-            <a:off x="647998" y="9963894"/>
-            <a:ext cx="6263878" cy="0"/>
-          </a:xfrm>
-          <a:prstGeom prst="line">
-            <a:avLst/>
-          </a:prstGeom>
-          <a:noFill/>
+            <a:off x="647998" y="5292030"/>
+            <a:ext cx="6263878" cy="1663898"/>
+          </a:xfrm>
+          <a:prstGeom prst="roundRect">
+            <a:avLst>
+              <a:gd name="adj" fmla="val 5725"/>
+            </a:avLst>
+          </a:prstGeom>
           <a:ln w="9525">
             <a:solidFill>
               <a:srgbClr val="E3E6EC"/>
@@ -5451,7 +5099,745 @@
       </p:sp>
       <p:sp>
         <p:nvSpPr>
+          <p:cNvPr id="41" name="box-40"/>
+          <p:cNvSpPr/>
+          <p:nvPr/>
+        </p:nvSpPr>
+        <p:spPr>
+          <a:xfrm>
+            <a:off x="657523" y="5301555"/>
+            <a:ext cx="6244828" cy="399306"/>
+          </a:xfrm>
+          <a:prstGeom prst="round2SameRect">
+            <a:avLst/>
+          </a:prstGeom>
+          <a:solidFill>
+            <a:srgbClr val="F6F7F9"/>
+          </a:solidFill>
+          <a:ln/>
+        </p:spPr>
+      </p:sp>
+      <p:sp>
+        <p:nvSpPr>
+          <p:cNvPr id="42" name="line-41"/>
+          <p:cNvSpPr/>
+          <p:nvPr/>
+        </p:nvSpPr>
+        <p:spPr>
+          <a:xfrm>
+            <a:off x="657523" y="5696099"/>
+            <a:ext cx="6244828" cy="0"/>
+          </a:xfrm>
+          <a:prstGeom prst="line">
+            <a:avLst/>
+          </a:prstGeom>
+          <a:noFill/>
+          <a:ln w="9525">
+            <a:solidFill>
+              <a:srgbClr val="E3E6EC"/>
+            </a:solidFill>
+            <a:prstDash val="solid"/>
+          </a:ln>
+        </p:spPr>
+      </p:sp>
+      <p:sp>
+        <p:nvSpPr>
+          <p:cNvPr id="43" name="text-42"/>
+          <p:cNvSpPr txBox="1"/>
+          <p:nvPr/>
+        </p:nvSpPr>
+        <p:spPr>
+          <a:xfrm>
+            <a:off x="809923" y="5415855"/>
+            <a:ext cx="531233" cy="152400"/>
+          </a:xfrm>
+          <a:prstGeom prst="rect">
+            <a:avLst/>
+          </a:prstGeom>
+          <a:noFill/>
+          <a:ln/>
+        </p:spPr>
+        <p:txBody>
+          <a:bodyPr wrap="none" lIns="0" tIns="0" rIns="0" bIns="0" rtlCol="0" anchor="ctr"/>
+          <a:lstStyle/>
+          <a:p>
+            <a:pPr algn="l" indent="0" marL="0">
+              <a:buNone/>
+            </a:pPr>
+            <a:r>
+              <a:rPr lang="ko-KR" altLang="en-US" sz="1013" b="1" dirty="0">
+                <a:solidFill>
+                  <a:srgbClr val="16181D"/>
+                </a:solidFill>
+                <a:latin typeface="Pretendard" pitchFamily="34" charset="0"/>
+                <a:ea typeface="Pretendard" pitchFamily="34" charset="-122"/>
+                <a:cs typeface="Pretendard" pitchFamily="34" charset="-120"/>
+              </a:rPr>
+              <a:t>입금 계좌</a:t>
+            </a:r>
+            <a:endParaRPr lang="ko-KR" sz="1013" dirty="0"/>
+          </a:p>
+        </p:txBody>
+      </p:sp>
+      <p:sp>
+        <p:nvSpPr>
+          <p:cNvPr id="44" name="text-43"/>
+          <p:cNvSpPr txBox="1"/>
+          <p:nvPr/>
+        </p:nvSpPr>
+        <p:spPr>
+          <a:xfrm>
+            <a:off x="809923" y="5824686"/>
+            <a:ext cx="269343" cy="152400"/>
+          </a:xfrm>
+          <a:prstGeom prst="rect">
+            <a:avLst/>
+          </a:prstGeom>
+          <a:noFill/>
+          <a:ln/>
+        </p:spPr>
+        <p:txBody>
+          <a:bodyPr wrap="none" lIns="0" tIns="0" rIns="0" bIns="0" rtlCol="0" anchor="ctr"/>
+          <a:lstStyle/>
+          <a:p>
+            <a:pPr algn="l" indent="0" marL="0">
+              <a:buNone/>
+            </a:pPr>
+            <a:r>
+              <a:rPr lang="ko-KR" altLang="en-US" sz="1013" dirty="0">
+                <a:solidFill>
+                  <a:srgbClr val="16181D"/>
+                </a:solidFill>
+                <a:latin typeface="Pretendard" pitchFamily="34" charset="0"/>
+                <a:ea typeface="Pretendard" pitchFamily="34" charset="-122"/>
+                <a:cs typeface="Pretendard" pitchFamily="34" charset="-120"/>
+              </a:rPr>
+              <a:t>은행</a:t>
+            </a:r>
+            <a:endParaRPr lang="ko-KR" sz="1013" dirty="0"/>
+          </a:p>
+        </p:txBody>
+      </p:sp>
+      <p:sp>
+        <p:nvSpPr>
+          <p:cNvPr id="45" name="text-44"/>
+          <p:cNvSpPr txBox="1"/>
+          <p:nvPr/>
+        </p:nvSpPr>
+        <p:spPr>
+          <a:xfrm>
+            <a:off x="6249519" y="5824686"/>
+            <a:ext cx="500432" cy="152400"/>
+          </a:xfrm>
+          <a:prstGeom prst="rect">
+            <a:avLst/>
+          </a:prstGeom>
+          <a:noFill/>
+          <a:ln/>
+        </p:spPr>
+        <p:txBody>
+          <a:bodyPr wrap="none" lIns="0" tIns="0" rIns="0" bIns="0" rtlCol="0" anchor="ctr"/>
+          <a:lstStyle/>
+          <a:p>
+            <a:pPr algn="r" indent="0" marL="0">
+              <a:buNone/>
+            </a:pPr>
+            <a:r>
+              <a:rPr lang="ko-KR" altLang="en-US" sz="1013" b="1" dirty="0">
+                <a:solidFill>
+                  <a:srgbClr val="16181D"/>
+                </a:solidFill>
+                <a:latin typeface="Pretendard" pitchFamily="34" charset="0"/>
+                <a:ea typeface="Pretendard" pitchFamily="34" charset="-122"/>
+                <a:cs typeface="Pretendard" pitchFamily="34" charset="-120"/>
+              </a:rPr>
+              <a:t>국민은행</a:t>
+            </a:r>
+            <a:endParaRPr lang="ko-KR" sz="1013" dirty="0"/>
+          </a:p>
+        </p:txBody>
+      </p:sp>
+      <p:sp>
+        <p:nvSpPr>
+          <p:cNvPr id="46" name="line-45"/>
+          <p:cNvSpPr/>
+          <p:nvPr/>
+        </p:nvSpPr>
+        <p:spPr>
+          <a:xfrm>
+            <a:off x="657523" y="6114455"/>
+            <a:ext cx="6244828" cy="0"/>
+          </a:xfrm>
+          <a:prstGeom prst="line">
+            <a:avLst/>
+          </a:prstGeom>
+          <a:noFill/>
+          <a:ln w="9525">
+            <a:solidFill>
+              <a:srgbClr val="E3E6EC"/>
+            </a:solidFill>
+            <a:prstDash val="solid"/>
+          </a:ln>
+        </p:spPr>
+      </p:sp>
+      <p:sp>
+        <p:nvSpPr>
+          <p:cNvPr id="47" name="text-46"/>
+          <p:cNvSpPr txBox="1"/>
+          <p:nvPr/>
+        </p:nvSpPr>
+        <p:spPr>
+          <a:xfrm>
+            <a:off x="809923" y="6243042"/>
+            <a:ext cx="500432" cy="152400"/>
+          </a:xfrm>
+          <a:prstGeom prst="rect">
+            <a:avLst/>
+          </a:prstGeom>
+          <a:noFill/>
+          <a:ln/>
+        </p:spPr>
+        <p:txBody>
+          <a:bodyPr wrap="none" lIns="0" tIns="0" rIns="0" bIns="0" rtlCol="0" anchor="ctr"/>
+          <a:lstStyle/>
+          <a:p>
+            <a:pPr algn="l" indent="0" marL="0">
+              <a:buNone/>
+            </a:pPr>
+            <a:r>
+              <a:rPr lang="ko-KR" altLang="en-US" sz="1013" dirty="0">
+                <a:solidFill>
+                  <a:srgbClr val="16181D"/>
+                </a:solidFill>
+                <a:latin typeface="Pretendard" pitchFamily="34" charset="0"/>
+                <a:ea typeface="Pretendard" pitchFamily="34" charset="-122"/>
+                <a:cs typeface="Pretendard" pitchFamily="34" charset="-120"/>
+              </a:rPr>
+              <a:t>계좌번호</a:t>
+            </a:r>
+            <a:endParaRPr lang="ko-KR" sz="1013" dirty="0"/>
+          </a:p>
+        </p:txBody>
+      </p:sp>
+      <p:sp>
+        <p:nvSpPr>
+          <p:cNvPr id="48" name="text-47"/>
+          <p:cNvSpPr txBox="1"/>
+          <p:nvPr/>
+        </p:nvSpPr>
+        <p:spPr>
+          <a:xfrm>
+            <a:off x="5279196" y="6243042"/>
+            <a:ext cx="1470755" cy="152400"/>
+          </a:xfrm>
+          <a:prstGeom prst="rect">
+            <a:avLst/>
+          </a:prstGeom>
+          <a:noFill/>
+          <a:ln/>
+        </p:spPr>
+        <p:txBody>
+          <a:bodyPr wrap="none" lIns="0" tIns="0" rIns="0" bIns="0" rtlCol="0" anchor="ctr"/>
+          <a:lstStyle/>
+          <a:p>
+            <a:pPr algn="r" indent="0" marL="0">
+              <a:buNone/>
+            </a:pPr>
+            <a:r>
+              <a:rPr lang="ko-KR" altLang="en-US" sz="1013" b="1" dirty="0">
+                <a:solidFill>
+                  <a:srgbClr val="16181D"/>
+                </a:solidFill>
+                <a:latin typeface="Pretendard" pitchFamily="34" charset="0"/>
+                <a:ea typeface="Pretendard" pitchFamily="34" charset="-122"/>
+                <a:cs typeface="Pretendard" pitchFamily="34" charset="-120"/>
+              </a:rPr>
+              <a:t>697201-00-1511772</a:t>
+            </a:r>
+            <a:endParaRPr lang="ko-KR" sz="1013" dirty="0"/>
+          </a:p>
+        </p:txBody>
+      </p:sp>
+      <p:sp>
+        <p:nvSpPr>
+          <p:cNvPr id="49" name="line-48"/>
+          <p:cNvSpPr/>
+          <p:nvPr/>
+        </p:nvSpPr>
+        <p:spPr>
+          <a:xfrm>
+            <a:off x="657523" y="6532811"/>
+            <a:ext cx="6244828" cy="0"/>
+          </a:xfrm>
+          <a:prstGeom prst="line">
+            <a:avLst/>
+          </a:prstGeom>
+          <a:noFill/>
+          <a:ln w="9525">
+            <a:solidFill>
+              <a:srgbClr val="E3E6EC"/>
+            </a:solidFill>
+            <a:prstDash val="solid"/>
+          </a:ln>
+        </p:spPr>
+      </p:sp>
+      <p:sp>
+        <p:nvSpPr>
+          <p:cNvPr id="50" name="text-49"/>
+          <p:cNvSpPr txBox="1"/>
+          <p:nvPr/>
+        </p:nvSpPr>
+        <p:spPr>
+          <a:xfrm>
+            <a:off x="809923" y="6661398"/>
+            <a:ext cx="384965" cy="152400"/>
+          </a:xfrm>
+          <a:prstGeom prst="rect">
+            <a:avLst/>
+          </a:prstGeom>
+          <a:noFill/>
+          <a:ln/>
+        </p:spPr>
+        <p:txBody>
+          <a:bodyPr wrap="none" lIns="0" tIns="0" rIns="0" bIns="0" rtlCol="0" anchor="ctr"/>
+          <a:lstStyle/>
+          <a:p>
+            <a:pPr algn="l" indent="0" marL="0">
+              <a:buNone/>
+            </a:pPr>
+            <a:r>
+              <a:rPr lang="ko-KR" altLang="en-US" sz="1013" dirty="0">
+                <a:solidFill>
+                  <a:srgbClr val="16181D"/>
+                </a:solidFill>
+                <a:latin typeface="Pretendard" pitchFamily="34" charset="0"/>
+                <a:ea typeface="Pretendard" pitchFamily="34" charset="-122"/>
+                <a:cs typeface="Pretendard" pitchFamily="34" charset="-120"/>
+              </a:rPr>
+              <a:t>예금주</a:t>
+            </a:r>
+            <a:endParaRPr lang="ko-KR" sz="1013" dirty="0"/>
+          </a:p>
+        </p:txBody>
+      </p:sp>
+      <p:sp>
+        <p:nvSpPr>
+          <p:cNvPr id="51" name="text-50"/>
+          <p:cNvSpPr txBox="1"/>
+          <p:nvPr/>
+        </p:nvSpPr>
+        <p:spPr>
+          <a:xfrm>
+            <a:off x="6364986" y="6661398"/>
+            <a:ext cx="384965" cy="152400"/>
+          </a:xfrm>
+          <a:prstGeom prst="rect">
+            <a:avLst/>
+          </a:prstGeom>
+          <a:noFill/>
+          <a:ln/>
+        </p:spPr>
+        <p:txBody>
+          <a:bodyPr wrap="none" lIns="0" tIns="0" rIns="0" bIns="0" rtlCol="0" anchor="ctr"/>
+          <a:lstStyle/>
+          <a:p>
+            <a:pPr algn="r" indent="0" marL="0">
+              <a:buNone/>
+            </a:pPr>
+            <a:r>
+              <a:rPr lang="ko-KR" altLang="en-US" sz="1013" b="1" dirty="0">
+                <a:solidFill>
+                  <a:srgbClr val="16181D"/>
+                </a:solidFill>
+                <a:latin typeface="Pretendard" pitchFamily="34" charset="0"/>
+                <a:ea typeface="Pretendard" pitchFamily="34" charset="-122"/>
+                <a:cs typeface="Pretendard" pitchFamily="34" charset="-120"/>
+              </a:rPr>
+              <a:t>유웹디</a:t>
+            </a:r>
+            <a:endParaRPr lang="ko-KR" sz="1013" dirty="0"/>
+          </a:p>
+        </p:txBody>
+      </p:sp>
+      <p:sp>
+        <p:nvSpPr>
           <p:cNvPr id="52" name="text-51"/>
+          <p:cNvSpPr txBox="1"/>
+          <p:nvPr/>
+        </p:nvSpPr>
+        <p:spPr>
+          <a:xfrm>
+            <a:off x="647998" y="7241679"/>
+            <a:ext cx="267486" cy="133350"/>
+          </a:xfrm>
+          <a:prstGeom prst="rect">
+            <a:avLst/>
+          </a:prstGeom>
+          <a:noFill/>
+          <a:ln/>
+        </p:spPr>
+        <p:txBody>
+          <a:bodyPr wrap="none" lIns="0" tIns="0" rIns="0" bIns="0" rtlCol="0" anchor="ctr"/>
+          <a:lstStyle/>
+          <a:p>
+            <a:pPr algn="l" indent="0" marL="0">
+              <a:buNone/>
+            </a:pPr>
+            <a:r>
+              <a:rPr lang="ko-KR" altLang="en-US" sz="900" b="1" spc="90" kern="0" dirty="0">
+                <a:solidFill>
+                  <a:srgbClr val="16181D"/>
+                </a:solidFill>
+                <a:latin typeface="Pretendard" pitchFamily="34" charset="0"/>
+                <a:ea typeface="Pretendard" pitchFamily="34" charset="-122"/>
+                <a:cs typeface="Pretendard" pitchFamily="34" charset="-120"/>
+              </a:rPr>
+              <a:t>비고</a:t>
+            </a:r>
+            <a:endParaRPr lang="ko-KR" sz="900" dirty="0"/>
+          </a:p>
+        </p:txBody>
+      </p:sp>
+      <p:sp>
+        <p:nvSpPr>
+          <p:cNvPr id="53" name="dot-52"/>
+          <p:cNvSpPr/>
+          <p:nvPr/>
+        </p:nvSpPr>
+        <p:spPr>
+          <a:xfrm>
+            <a:off x="688479" y="7525941"/>
+            <a:ext cx="42863" cy="42863"/>
+          </a:xfrm>
+          <a:prstGeom prst="ellipse">
+            <a:avLst/>
+          </a:prstGeom>
+          <a:solidFill>
+            <a:srgbClr val="5B6270"/>
+          </a:solidFill>
+          <a:ln/>
+        </p:spPr>
+      </p:sp>
+      <p:sp>
+        <p:nvSpPr>
+          <p:cNvPr id="54" name="text-53"/>
+          <p:cNvSpPr txBox="1"/>
+          <p:nvPr/>
+        </p:nvSpPr>
+        <p:spPr>
+          <a:xfrm>
+            <a:off x="819448" y="7475934"/>
+            <a:ext cx="497336" cy="142875"/>
+          </a:xfrm>
+          <a:prstGeom prst="rect">
+            <a:avLst/>
+          </a:prstGeom>
+          <a:noFill/>
+          <a:ln/>
+        </p:spPr>
+        <p:txBody>
+          <a:bodyPr wrap="none" lIns="0" tIns="0" rIns="0" bIns="0" rtlCol="0" anchor="ctr"/>
+          <a:lstStyle/>
+          <a:p>
+            <a:pPr algn="l" indent="0" marL="0">
+              <a:buNone/>
+            </a:pPr>
+            <a:r>
+              <a:rPr lang="ko-KR" altLang="en-US" sz="938" dirty="0">
+                <a:solidFill>
+                  <a:srgbClr val="5B6270"/>
+                </a:solidFill>
+                <a:latin typeface="Pretendard" pitchFamily="34" charset="0"/>
+                <a:ea typeface="Pretendard" pitchFamily="34" charset="-122"/>
+                <a:cs typeface="Pretendard" pitchFamily="34" charset="-120"/>
+              </a:rPr>
+              <a:t>위 금액은</a:t>
+            </a:r>
+            <a:endParaRPr lang="ko-KR" sz="938" dirty="0"/>
+          </a:p>
+        </p:txBody>
+      </p:sp>
+      <p:sp>
+        <p:nvSpPr>
+          <p:cNvPr id="55" name="text-54"/>
+          <p:cNvSpPr txBox="1"/>
+          <p:nvPr/>
+        </p:nvSpPr>
+        <p:spPr>
+          <a:xfrm>
+            <a:off x="1290935" y="7475934"/>
+            <a:ext cx="601813" cy="142875"/>
+          </a:xfrm>
+          <a:prstGeom prst="rect">
+            <a:avLst/>
+          </a:prstGeom>
+          <a:noFill/>
+          <a:ln/>
+        </p:spPr>
+        <p:txBody>
+          <a:bodyPr wrap="none" lIns="0" tIns="0" rIns="0" bIns="0" rtlCol="0" anchor="ctr"/>
+          <a:lstStyle/>
+          <a:p>
+            <a:pPr algn="l" indent="0" marL="0">
+              <a:buNone/>
+            </a:pPr>
+            <a:r>
+              <a:rPr lang="ko-KR" altLang="en-US" sz="938" b="1" dirty="0">
+                <a:solidFill>
+                  <a:srgbClr val="5B6270"/>
+                </a:solidFill>
+                <a:latin typeface="Pretendard" pitchFamily="34" charset="0"/>
+                <a:ea typeface="Pretendard" pitchFamily="34" charset="-122"/>
+                <a:cs typeface="Pretendard" pitchFamily="34" charset="-120"/>
+              </a:rPr>
+              <a:t>부가세 별도</a:t>
+            </a:r>
+            <a:endParaRPr lang="ko-KR" sz="938" dirty="0"/>
+          </a:p>
+        </p:txBody>
+      </p:sp>
+      <p:sp>
+        <p:nvSpPr>
+          <p:cNvPr id="56" name="text-55"/>
+          <p:cNvSpPr txBox="1"/>
+          <p:nvPr/>
+        </p:nvSpPr>
+        <p:spPr>
+          <a:xfrm>
+            <a:off x="1862733" y="7475934"/>
+            <a:ext cx="2884372" cy="142875"/>
+          </a:xfrm>
+          <a:prstGeom prst="rect">
+            <a:avLst/>
+          </a:prstGeom>
+          <a:noFill/>
+          <a:ln/>
+        </p:spPr>
+        <p:txBody>
+          <a:bodyPr wrap="none" lIns="0" tIns="0" rIns="0" bIns="0" rtlCol="0" anchor="ctr"/>
+          <a:lstStyle/>
+          <a:p>
+            <a:pPr algn="l" indent="0" marL="0">
+              <a:buNone/>
+            </a:pPr>
+            <a:r>
+              <a:rPr lang="ko-KR" altLang="en-US" sz="938" dirty="0">
+                <a:solidFill>
+                  <a:srgbClr val="5B6270"/>
+                </a:solidFill>
+                <a:latin typeface="Pretendard" pitchFamily="34" charset="0"/>
+                <a:ea typeface="Pretendard" pitchFamily="34" charset="-122"/>
+                <a:cs typeface="Pretendard" pitchFamily="34" charset="-120"/>
+              </a:rPr>
+              <a:t>금액이며, 부가세 10%를 더한 합계는 3,300,000원입니다.</a:t>
+            </a:r>
+            <a:endParaRPr lang="ko-KR" sz="938" dirty="0"/>
+          </a:p>
+        </p:txBody>
+      </p:sp>
+      <p:sp>
+        <p:nvSpPr>
+          <p:cNvPr id="57" name="dot-56"/>
+          <p:cNvSpPr/>
+          <p:nvPr/>
+        </p:nvSpPr>
+        <p:spPr>
+          <a:xfrm>
+            <a:off x="688479" y="7729538"/>
+            <a:ext cx="42863" cy="42863"/>
+          </a:xfrm>
+          <a:prstGeom prst="ellipse">
+            <a:avLst/>
+          </a:prstGeom>
+          <a:solidFill>
+            <a:srgbClr val="5B6270"/>
+          </a:solidFill>
+          <a:ln/>
+        </p:spPr>
+      </p:sp>
+      <p:sp>
+        <p:nvSpPr>
+          <p:cNvPr id="58" name="text-57"/>
+          <p:cNvSpPr txBox="1"/>
+          <p:nvPr/>
+        </p:nvSpPr>
+        <p:spPr>
+          <a:xfrm>
+            <a:off x="819448" y="7679531"/>
+            <a:ext cx="2174391" cy="142875"/>
+          </a:xfrm>
+          <a:prstGeom prst="rect">
+            <a:avLst/>
+          </a:prstGeom>
+          <a:noFill/>
+          <a:ln/>
+        </p:spPr>
+        <p:txBody>
+          <a:bodyPr wrap="none" lIns="0" tIns="0" rIns="0" bIns="0" rtlCol="0" anchor="ctr"/>
+          <a:lstStyle/>
+          <a:p>
+            <a:pPr algn="l" indent="0" marL="0">
+              <a:buNone/>
+            </a:pPr>
+            <a:r>
+              <a:rPr lang="ko-KR" altLang="en-US" sz="938" dirty="0">
+                <a:solidFill>
+                  <a:srgbClr val="5B6270"/>
+                </a:solidFill>
+                <a:latin typeface="Pretendard" pitchFamily="34" charset="0"/>
+                <a:ea typeface="Pretendard" pitchFamily="34" charset="-122"/>
+                <a:cs typeface="Pretendard" pitchFamily="34" charset="-120"/>
+              </a:rPr>
+              <a:t>결제 조건: 계약 시 50%, 오픈 시 잔금 50%.</a:t>
+            </a:r>
+            <a:endParaRPr lang="ko-KR" sz="938" dirty="0"/>
+          </a:p>
+        </p:txBody>
+      </p:sp>
+      <p:sp>
+        <p:nvSpPr>
+          <p:cNvPr id="59" name="dot-58"/>
+          <p:cNvSpPr/>
+          <p:nvPr/>
+        </p:nvSpPr>
+        <p:spPr>
+          <a:xfrm>
+            <a:off x="688479" y="7933134"/>
+            <a:ext cx="42863" cy="42863"/>
+          </a:xfrm>
+          <a:prstGeom prst="ellipse">
+            <a:avLst/>
+          </a:prstGeom>
+          <a:solidFill>
+            <a:srgbClr val="5B6270"/>
+          </a:solidFill>
+          <a:ln/>
+        </p:spPr>
+      </p:sp>
+      <p:sp>
+        <p:nvSpPr>
+          <p:cNvPr id="60" name="text-59"/>
+          <p:cNvSpPr txBox="1"/>
+          <p:nvPr/>
+        </p:nvSpPr>
+        <p:spPr>
+          <a:xfrm>
+            <a:off x="819448" y="7883128"/>
+            <a:ext cx="5319236" cy="142875"/>
+          </a:xfrm>
+          <a:prstGeom prst="rect">
+            <a:avLst/>
+          </a:prstGeom>
+          <a:noFill/>
+          <a:ln/>
+        </p:spPr>
+        <p:txBody>
+          <a:bodyPr wrap="none" lIns="0" tIns="0" rIns="0" bIns="0" rtlCol="0" anchor="ctr"/>
+          <a:lstStyle/>
+          <a:p>
+            <a:pPr algn="l" indent="0" marL="0">
+              <a:buNone/>
+            </a:pPr>
+            <a:r>
+              <a:rPr lang="ko-KR" altLang="en-US" sz="938" dirty="0">
+                <a:solidFill>
+                  <a:srgbClr val="5B6270"/>
+                </a:solidFill>
+                <a:latin typeface="Pretendard" pitchFamily="34" charset="0"/>
+                <a:ea typeface="Pretendard" pitchFamily="34" charset="-122"/>
+                <a:cs typeface="Pretendard" pitchFamily="34" charset="-120"/>
+              </a:rPr>
+              <a:t>제작 기간: 계약 및 자료 수령 후 약 3주. 웹빌더 호스팅·도메인·SSL 비용은 제작비와 별도입니다(위 안내 참조).</a:t>
+            </a:r>
+            <a:endParaRPr lang="ko-KR" sz="938" dirty="0"/>
+          </a:p>
+        </p:txBody>
+      </p:sp>
+      <p:sp>
+        <p:nvSpPr>
+          <p:cNvPr id="61" name="dot-60"/>
+          <p:cNvSpPr/>
+          <p:nvPr/>
+        </p:nvSpPr>
+        <p:spPr>
+          <a:xfrm>
+            <a:off x="688479" y="8136731"/>
+            <a:ext cx="42863" cy="42863"/>
+          </a:xfrm>
+          <a:prstGeom prst="ellipse">
+            <a:avLst/>
+          </a:prstGeom>
+          <a:solidFill>
+            <a:srgbClr val="5B6270"/>
+          </a:solidFill>
+          <a:ln/>
+        </p:spPr>
+      </p:sp>
+      <p:sp>
+        <p:nvSpPr>
+          <p:cNvPr id="62" name="text-61"/>
+          <p:cNvSpPr txBox="1"/>
+          <p:nvPr/>
+        </p:nvSpPr>
+        <p:spPr>
+          <a:xfrm>
+            <a:off x="819448" y="8086725"/>
+            <a:ext cx="1978902" cy="142875"/>
+          </a:xfrm>
+          <a:prstGeom prst="rect">
+            <a:avLst/>
+          </a:prstGeom>
+          <a:noFill/>
+          <a:ln/>
+        </p:spPr>
+        <p:txBody>
+          <a:bodyPr wrap="none" lIns="0" tIns="0" rIns="0" bIns="0" rtlCol="0" anchor="ctr"/>
+          <a:lstStyle/>
+          <a:p>
+            <a:pPr algn="l" indent="0" marL="0">
+              <a:buNone/>
+            </a:pPr>
+            <a:r>
+              <a:rPr lang="ko-KR" altLang="en-US" sz="938" dirty="0">
+                <a:solidFill>
+                  <a:srgbClr val="5B6270"/>
+                </a:solidFill>
+                <a:latin typeface="Pretendard" pitchFamily="34" charset="0"/>
+                <a:ea typeface="Pretendard" pitchFamily="34" charset="-122"/>
+                <a:cs typeface="Pretendard" pitchFamily="34" charset="-120"/>
+              </a:rPr>
+              <a:t>수정은 시안 단계별 2회까지 포함합니다.</a:t>
+            </a:r>
+            <a:endParaRPr lang="ko-KR" sz="938" dirty="0"/>
+          </a:p>
+        </p:txBody>
+      </p:sp>
+      <p:sp>
+        <p:nvSpPr>
+          <p:cNvPr id="63" name="line-62"/>
+          <p:cNvSpPr/>
+          <p:nvPr/>
+        </p:nvSpPr>
+        <p:spPr>
+          <a:xfrm>
+            <a:off x="647998" y="9963894"/>
+            <a:ext cx="6263878" cy="0"/>
+          </a:xfrm>
+          <a:prstGeom prst="line">
+            <a:avLst/>
+          </a:prstGeom>
+          <a:noFill/>
+          <a:ln w="9525">
+            <a:solidFill>
+              <a:srgbClr val="E3E6EC"/>
+            </a:solidFill>
+            <a:prstDash val="solid"/>
+          </a:ln>
+        </p:spPr>
+      </p:sp>
+      <p:sp>
+        <p:nvSpPr>
+          <p:cNvPr id="64" name="text-63"/>
           <p:cNvSpPr txBox="1"/>
           <p:nvPr/>
         </p:nvSpPr>
@@ -5490,7 +5876,7 @@
       </p:sp>
       <p:sp>
         <p:nvSpPr>
-          <p:cNvPr id="53" name="text-52"/>
+          <p:cNvPr id="65" name="text-64"/>
           <p:cNvSpPr txBox="1"/>
           <p:nvPr/>
         </p:nvSpPr>
